--- a/1_Sessions/B4_Power_Query/Slide_B4_HocVien.pptx
+++ b/1_Sessions/B4_Power_Query/Slide_B4_HocVien.pptx
@@ -4074,7 +4074,7 @@
         <p:spPr>
           <a:xfrm>
             <a:off x="1524000" y="5760720"/>
-            <a:ext cx="10119360" cy="457200"/>
+            <a:ext cx="10119360" cy="822960"/>
           </a:xfrm>
           <a:prstGeom prst="rect">
             <a:avLst/>
@@ -4100,6 +4100,36 @@
                 </a:solidFill>
               </a:rPr>
               <a:t>Bắt buộc máy Windows có Power Query (Data → Get Data)</a:t>
+            </a:r>
+            <a:r>
+              <a:rPr lang="vi-VN" sz="1400" b="1">
+                <a:solidFill>
+                  <a:srgbClr val="1B2230"/>
+                </a:solidFill>
+              </a:rPr>
+              <a:t/>
+            </a:r>
+            <a:r>
+              <a:rPr lang="vi-VN" sz="1400">
+                <a:solidFill>
+                  <a:srgbClr val="585858"/>
+                </a:solidFill>
+              </a:rPr>
+              <a:t/>
+            </a:r>
+            <a:endParaRPr lang="vi-VN" sz="1400"/>
+          </a:p>
+          <a:p>
+            <a:pPr marL="0" indent="0">
+              <a:buNone/>
+            </a:pPr>
+            <a:r>
+              <a:rPr lang="vi-VN" sz="1400">
+                <a:solidFill>
+                  <a:srgbClr val="585858"/>
+                </a:solidFill>
+              </a:rPr>
+              <a:t>Mở sẵn: file khởi đầu B3_MCI_Mart_Q1_2025_Answer.xlsx (đáp án Buổi 3)</a:t>
             </a:r>
             <a:r>
               <a:rPr lang="vi-VN" sz="1400" b="1">
@@ -4764,7 +4794,7 @@
                 </a:solidFill>
                 <a:latin typeface="Arial"/>
               </a:rPr>
-              <a:t>dòng Error; 991 dòng đảo ngày–tháng</a:t>
+              <a:t>dòng Error; 927 dòng đảo ngày–tháng</a:t>
             </a:r>
           </a:p>
         </p:txBody>
@@ -5148,7 +5178,7 @@
                           </a:solidFill>
                           <a:latin typeface="Arial"/>
                         </a:rPr>
-                        <a:t>Tên (đỏ)</a:t>
+                        <a:t>Tên</a:t>
                       </a:r>
                     </a:p>
                   </a:txBody>
@@ -5455,8 +5485,8 @@
         </p:blipFill>
         <p:spPr>
           <a:xfrm>
-            <a:off x="1527048" y="3648815"/>
-            <a:ext cx="4965192" cy="2349289"/>
+            <a:off x="2125386" y="3611880"/>
+            <a:ext cx="3768516" cy="1783080"/>
           </a:xfrm>
           <a:prstGeom prst="rect">
             <a:avLst/>
@@ -5484,8 +5514,8 @@
         </p:blipFill>
         <p:spPr>
           <a:xfrm>
-            <a:off x="6684264" y="3793562"/>
-            <a:ext cx="4965192" cy="2059796"/>
+            <a:off x="7017780" y="3611880"/>
+            <a:ext cx="4298160" cy="1783080"/>
           </a:xfrm>
           <a:prstGeom prst="rect">
             <a:avLst/>
@@ -5499,7 +5529,121 @@
       </p:pic>
       <p:sp>
         <p:nvSpPr>
-          <p:cNvPr id="7" name="Footnote"/>
+          <p:cNvPr id="7" name="TIP callout"/>
+          <p:cNvSpPr/>
+          <p:nvPr/>
+        </p:nvSpPr>
+        <p:spPr>
+          <a:xfrm>
+            <a:off x="1527048" y="5486400"/>
+            <a:ext cx="10122408" cy="640080"/>
+          </a:xfrm>
+          <a:prstGeom prst="roundRect">
+            <a:avLst>
+              <a:gd name="adj" fmla="val 6000"/>
+            </a:avLst>
+          </a:prstGeom>
+          <a:solidFill>
+            <a:srgbClr val="F3F5F9"/>
+          </a:solidFill>
+          <a:ln>
+            <a:noFill/>
+          </a:ln>
+          <a:effectLst/>
+        </p:spPr>
+        <p:style>
+          <a:lnRef idx="1">
+            <a:schemeClr val="accent1"/>
+          </a:lnRef>
+          <a:fillRef idx="3">
+            <a:schemeClr val="accent1"/>
+          </a:fillRef>
+          <a:effectRef idx="2">
+            <a:schemeClr val="accent1"/>
+          </a:effectRef>
+          <a:fontRef idx="minor">
+            <a:schemeClr val="lt1"/>
+          </a:fontRef>
+        </p:style>
+        <p:txBody>
+          <a:bodyPr rtlCol="0" anchor="ctr"/>
+          <a:lstStyle/>
+          <a:p>
+            <a:pPr algn="ctr"/>
+          </a:p>
+        </p:txBody>
+      </p:sp>
+      <p:sp>
+        <p:nvSpPr>
+          <p:cNvPr id="8" name="TextBox"/>
+          <p:cNvSpPr txBox="1"/>
+          <p:nvPr/>
+        </p:nvSpPr>
+        <p:spPr>
+          <a:xfrm>
+            <a:off x="1636776" y="5596128"/>
+            <a:ext cx="548640" cy="320040"/>
+          </a:xfrm>
+          <a:prstGeom prst="rect">
+            <a:avLst/>
+          </a:prstGeom>
+          <a:noFill/>
+        </p:spPr>
+        <p:txBody>
+          <a:bodyPr wrap="square" lIns="0" rIns="0" tIns="0" bIns="0" anchor="ctr">
+            <a:spAutoFit/>
+          </a:bodyPr>
+          <a:lstStyle/>
+          <a:p>
+            <a:r>
+              <a:rPr sz="1400" b="1">
+                <a:solidFill>
+                  <a:srgbClr val="203864"/>
+                </a:solidFill>
+                <a:latin typeface="Arial"/>
+              </a:rPr>
+              <a:t>TIP</a:t>
+            </a:r>
+          </a:p>
+        </p:txBody>
+      </p:sp>
+      <p:sp>
+        <p:nvSpPr>
+          <p:cNvPr id="9" name="TIP text"/>
+          <p:cNvSpPr txBox="1"/>
+          <p:nvPr/>
+        </p:nvSpPr>
+        <p:spPr>
+          <a:xfrm>
+            <a:off x="2212848" y="5577840"/>
+            <a:ext cx="9326880" cy="457199"/>
+          </a:xfrm>
+          <a:prstGeom prst="rect">
+            <a:avLst/>
+          </a:prstGeom>
+          <a:noFill/>
+        </p:spPr>
+        <p:txBody>
+          <a:bodyPr wrap="square" lIns="0" rIns="0" tIns="0" bIns="0" anchor="t">
+            <a:spAutoFit/>
+          </a:bodyPr>
+          <a:lstStyle/>
+          <a:p>
+            <a:r>
+              <a:rPr sz="1600" b="0">
+                <a:solidFill>
+                  <a:srgbClr val="1B2230"/>
+                </a:solidFill>
+                <a:latin typeface="Arial"/>
+              </a:rPr>
+              <a:t>Trim/Clean có ở cả Transform (sửa cột đang có) và Add Column (tạo cột mới): chọn đúng tab theo việc mình muốn.</a:t>
+            </a:r>
+          </a:p>
+        </p:txBody>
+      </p:sp>
+      <p:sp>
+        <p:nvSpPr>
+          <p:cNvPr id="10" name="Footnote"/>
           <p:cNvSpPr txBox="1"/>
           <p:nvPr/>
         </p:nvSpPr>
@@ -5526,7 +5670,7 @@
                 </a:solidFill>
                 <a:latin typeface="Arial"/>
               </a:rPr>
-              <a:t>Ảnh: query Sales_T1 (Practice/Data_Sales/Sales_2025-01.csv) · Trim/Clean có ở cả Transform (sửa cột) và Add Column (tạo cột mới)</a:t>
+              <a:t>Ảnh: Query Editor, query Sales_T1 (Practice/Data_Sales/Sales_2025-01.csv)</a:t>
             </a:r>
           </a:p>
         </p:txBody>
@@ -5689,8 +5833,8 @@
         </p:blipFill>
         <p:spPr>
           <a:xfrm>
-            <a:off x="1650846" y="2560320"/>
-            <a:ext cx="4717595" cy="2651760"/>
+            <a:off x="1683110" y="2560320"/>
+            <a:ext cx="3985555" cy="2240280"/>
           </a:xfrm>
           <a:prstGeom prst="rect">
             <a:avLst/>
@@ -5718,8 +5862,8 @@
         </p:blipFill>
         <p:spPr>
           <a:xfrm>
-            <a:off x="6684264" y="2593365"/>
-            <a:ext cx="4965192" cy="2585669"/>
+            <a:off x="5020056" y="2561754"/>
+            <a:ext cx="4297680" cy="2237412"/>
           </a:xfrm>
           <a:prstGeom prst="rect">
             <a:avLst/>
@@ -5733,14 +5877,128 @@
       </p:pic>
       <p:sp>
         <p:nvSpPr>
-          <p:cNvPr id="8" name="TIP callout"/>
+          <p:cNvPr id="8" name="Stat card"/>
           <p:cNvSpPr/>
           <p:nvPr/>
         </p:nvSpPr>
         <p:spPr>
           <a:xfrm>
-            <a:off x="1527048" y="5349240"/>
-            <a:ext cx="10122408" cy="822960"/>
+            <a:off x="9454896" y="2560320"/>
+            <a:ext cx="2194560" cy="2240280"/>
+          </a:xfrm>
+          <a:prstGeom prst="roundRect">
+            <a:avLst>
+              <a:gd name="adj" fmla="val 6000"/>
+            </a:avLst>
+          </a:prstGeom>
+          <a:solidFill>
+            <a:srgbClr val="FFFFFF"/>
+          </a:solidFill>
+          <a:ln w="12700">
+            <a:solidFill>
+              <a:srgbClr val="D9DEE8"/>
+            </a:solidFill>
+          </a:ln>
+          <a:effectLst/>
+        </p:spPr>
+        <p:style>
+          <a:lnRef idx="1">
+            <a:schemeClr val="accent1"/>
+          </a:lnRef>
+          <a:fillRef idx="3">
+            <a:schemeClr val="accent1"/>
+          </a:fillRef>
+          <a:effectRef idx="2">
+            <a:schemeClr val="accent1"/>
+          </a:effectRef>
+          <a:fontRef idx="minor">
+            <a:schemeClr val="lt1"/>
+          </a:fontRef>
+        </p:style>
+        <p:txBody>
+          <a:bodyPr rtlCol="0" anchor="ctr"/>
+          <a:lstStyle/>
+          <a:p>
+            <a:pPr algn="ctr"/>
+          </a:p>
+        </p:txBody>
+      </p:sp>
+      <p:sp>
+        <p:nvSpPr>
+          <p:cNvPr id="9" name="TextBox"/>
+          <p:cNvSpPr txBox="1"/>
+          <p:nvPr/>
+        </p:nvSpPr>
+        <p:spPr>
+          <a:xfrm>
+            <a:off x="9637776" y="2651760"/>
+            <a:ext cx="1828800" cy="2057400"/>
+          </a:xfrm>
+          <a:prstGeom prst="rect">
+            <a:avLst/>
+          </a:prstGeom>
+          <a:noFill/>
+        </p:spPr>
+        <p:txBody>
+          <a:bodyPr wrap="square" lIns="0" rIns="0" tIns="0" bIns="0" anchor="ctr">
+            <a:spAutoFit/>
+          </a:bodyPr>
+          <a:lstStyle/>
+          <a:p>
+            <a:r>
+              <a:rPr sz="1400" b="0">
+                <a:solidFill>
+                  <a:srgbClr val="585858"/>
+                </a:solidFill>
+                <a:latin typeface="Arial"/>
+              </a:rPr>
+              <a:t>Merge khi chưa bỏ P015 trùng</a:t>
+            </a:r>
+          </a:p>
+          <a:p>
+            <a:pPr>
+              <a:spcBef>
+                <a:spcPts val="200"/>
+              </a:spcBef>
+            </a:pPr>
+            <a:r>
+              <a:rPr sz="2400" b="1">
+                <a:solidFill>
+                  <a:srgbClr val="9C0006"/>
+                </a:solidFill>
+                <a:latin typeface="Arial"/>
+              </a:rPr>
+              <a:t>29.408 dòng</a:t>
+            </a:r>
+          </a:p>
+          <a:p>
+            <a:pPr>
+              <a:spcBef>
+                <a:spcPts val="200"/>
+              </a:spcBef>
+            </a:pPr>
+            <a:r>
+              <a:rPr sz="1400" b="0">
+                <a:solidFill>
+                  <a:srgbClr val="1B2230"/>
+                </a:solidFill>
+                <a:latin typeface="Arial"/>
+              </a:rPr>
+              <a:t>thay vì 28.328 — 1.080 dòng P015 bị nhân đôi</a:t>
+            </a:r>
+          </a:p>
+        </p:txBody>
+      </p:sp>
+      <p:sp>
+        <p:nvSpPr>
+          <p:cNvPr id="10" name="TIP callout"/>
+          <p:cNvSpPr/>
+          <p:nvPr/>
+        </p:nvSpPr>
+        <p:spPr>
+          <a:xfrm>
+            <a:off x="1527048" y="4937760"/>
+            <a:ext cx="10122408" cy="1188720"/>
           </a:xfrm>
           <a:prstGeom prst="roundRect">
             <a:avLst>
@@ -5779,13 +6037,13 @@
       </p:sp>
       <p:sp>
         <p:nvSpPr>
-          <p:cNvPr id="9" name="TextBox"/>
+          <p:cNvPr id="11" name="TextBox"/>
           <p:cNvSpPr txBox="1"/>
           <p:nvPr/>
         </p:nvSpPr>
         <p:spPr>
           <a:xfrm>
-            <a:off x="1636776" y="5458968"/>
+            <a:off x="1636776" y="5047488"/>
             <a:ext cx="548640" cy="320040"/>
           </a:xfrm>
           <a:prstGeom prst="rect">
@@ -5813,14 +6071,14 @@
       </p:sp>
       <p:sp>
         <p:nvSpPr>
-          <p:cNvPr id="10" name="TIP text"/>
+          <p:cNvPr id="12" name="TIP text"/>
           <p:cNvSpPr txBox="1"/>
           <p:nvPr/>
         </p:nvSpPr>
         <p:spPr>
           <a:xfrm>
-            <a:off x="2212848" y="5440679"/>
-            <a:ext cx="9326880" cy="640080"/>
+            <a:off x="2212848" y="5029200"/>
+            <a:ext cx="9326880" cy="1005840"/>
           </a:xfrm>
           <a:prstGeom prst="rect">
             <a:avLst/>
@@ -5840,14 +6098,14 @@
                 </a:solidFill>
                 <a:latin typeface="Arial"/>
               </a:rPr>
-              <a:t>Chưa bỏ P015 trùng mà Merge Sales × Product: 29.408 dòng thay vì 28.328. Đếm dòng ngay trong PQ: Transform → Count Rows, xem xong xóa bước đếm.</a:t>
-            </a:r>
-          </a:p>
-        </p:txBody>
-      </p:sp>
-      <p:sp>
-        <p:nvSpPr>
-          <p:cNvPr id="11" name="Footnote"/>
+              <a:t>Đếm dòng ngay trong Power Query: Transform → Count Rows, xem số, rồi xóa bước đó. Remove Duplicates chỉ xét các cột đang chọn: chọn cả bảng (Ctrl+A) cho bảng giao dịch, chỉ cột khóa cho bảng lookup.</a:t>
+            </a:r>
+          </a:p>
+        </p:txBody>
+      </p:sp>
+      <p:sp>
+        <p:nvSpPr>
+          <p:cNvPr id="13" name="Footnote"/>
           <p:cNvSpPr txBox="1"/>
           <p:nvPr/>
         </p:nvSpPr>
@@ -6601,8 +6859,8 @@
         </p:blipFill>
         <p:spPr>
           <a:xfrm>
-            <a:off x="1527048" y="2833107"/>
-            <a:ext cx="4114800" cy="1969026"/>
+            <a:off x="1527048" y="2684045"/>
+            <a:ext cx="4114800" cy="2267150"/>
           </a:xfrm>
           <a:prstGeom prst="rect">
             <a:avLst/>
@@ -6630,8 +6888,8 @@
         </p:blipFill>
         <p:spPr>
           <a:xfrm>
-            <a:off x="5779008" y="2833107"/>
-            <a:ext cx="4114800" cy="1969026"/>
+            <a:off x="5779008" y="2684045"/>
+            <a:ext cx="4114800" cy="2267150"/>
           </a:xfrm>
           <a:prstGeom prst="rect">
             <a:avLst/>
@@ -7204,7 +7462,7 @@
                 </a:solidFill>
                 <a:latin typeface="Arial"/>
               </a:rPr>
-              <a:t>353 tr</a:t>
+              <a:t>353.000.000</a:t>
             </a:r>
           </a:p>
           <a:p>
@@ -7220,7 +7478,7 @@
                 </a:solidFill>
                 <a:latin typeface="Arial"/>
               </a:rPr>
-              <a:t>thực tế 425,85 tr · 120,6%</a:t>
+              <a:t>thực tế 425.850.000 · 120,6%</a:t>
             </a:r>
           </a:p>
         </p:txBody>
@@ -7318,7 +7576,7 @@
                 </a:solidFill>
                 <a:latin typeface="Arial"/>
               </a:rPr>
-              <a:t>298 tr</a:t>
+              <a:t>298.000.000</a:t>
             </a:r>
           </a:p>
           <a:p>
@@ -7334,7 +7592,7 @@
                 </a:solidFill>
                 <a:latin typeface="Arial"/>
               </a:rPr>
-              <a:t>thực tế 246,0 tr · 82,5%</a:t>
+              <a:t>thực tế 245.996.000 · 82,5%</a:t>
             </a:r>
           </a:p>
         </p:txBody>
@@ -7937,7 +8195,7 @@
                           </a:solidFill>
                           <a:latin typeface="Arial"/>
                         </a:rPr>
-                        <a:t>Tên (đỏ)</a:t>
+                        <a:t>Tên</a:t>
                       </a:r>
                     </a:p>
                   </a:txBody>
@@ -12380,7 +12638,7 @@
                 </a:solidFill>
                 <a:latin typeface="Arial"/>
               </a:rPr>
-              <a:t>Ảnh: B4_&lt;HoTen&gt;.xlsx, Data → Queries &amp; Connections · Pivot PV_Refresh (Nam × Thang) phải ra 28.328 dòng, 4.139.884.500</a:t>
+              <a:t>Ảnh: B4_&lt;HoTen&gt;.xlsx, Data → Queries &amp; Connections</a:t>
             </a:r>
           </a:p>
         </p:txBody>
@@ -12805,7 +13063,7 @@
                 </a:solidFill>
                 <a:latin typeface="Arial"/>
               </a:rPr>
-              <a:t>File tháng 4: Practice/New_Month/Sales_2025-04.csv (1.920 dòng thô)</a:t>
+              <a:t>File tháng 4: Practice/New_Month/Sales_2025-04.csv</a:t>
             </a:r>
           </a:p>
         </p:txBody>
@@ -16973,7 +17231,7 @@
           <a:lstStyle/>
           <a:p>
             <a:r>
-              <a:t>Question 6: Tình huống — Refresh lỗi</a:t>
+              <a:t>Question 6: Tình huống — Lỗi ngầm</a:t>
             </a:r>
           </a:p>
         </p:txBody>
@@ -17036,13 +17294,13 @@
           <a:lstStyle/>
           <a:p>
             <a:r>
-              <a:rPr sz="2000" b="0">
+              <a:rPr sz="1800" b="0">
                 <a:solidFill>
                   <a:srgbClr val="1B2230"/>
                 </a:solidFill>
                 <a:latin typeface="Arial"/>
               </a:rPr>
-              <a:t>File CSV mới đổi tên cột Store_Code thành StoreCode. Refresh báo lỗi ở bước Trim cột Store_Code. Nguyên nhân?</a:t>
+              <a:t>File CSV tháng mới đổi tên cột Store_Code thành StoreCode. Refresh All không báo lỗi, nhưng bộ lọc Store_Code của Pivot có thêm mục (blank). Nguyên nhân?</a:t>
             </a:r>
           </a:p>
         </p:txBody>
@@ -17169,13 +17427,13 @@
           <a:lstStyle/>
           <a:p>
             <a:r>
-              <a:rPr sz="1400" b="0">
+              <a:rPr sz="1300" b="0">
                 <a:solidFill>
                   <a:srgbClr val="1B2230"/>
                 </a:solidFill>
                 <a:latin typeface="Arial"/>
               </a:rPr>
-              <a:t>File bị hỏng</a:t>
+              <a:t>File mới bị hỏng</a:t>
             </a:r>
           </a:p>
         </p:txBody>
@@ -17302,7 +17560,7 @@
           <a:lstStyle/>
           <a:p>
             <a:r>
-              <a:rPr sz="1400" b="0">
+              <a:rPr sz="1300" b="0">
                 <a:solidFill>
                   <a:srgbClr val="1B2230"/>
                 </a:solidFill>
@@ -17435,7 +17693,7 @@
           <a:lstStyle/>
           <a:p>
             <a:r>
-              <a:rPr sz="1400" b="0">
+              <a:rPr sz="1300" b="0">
                 <a:solidFill>
                   <a:srgbClr val="1B2230"/>
                 </a:solidFill>
@@ -17568,13 +17826,13 @@
           <a:lstStyle/>
           <a:p>
             <a:r>
-              <a:rPr sz="1400" b="0">
+              <a:rPr sz="1300" b="0">
                 <a:solidFill>
                   <a:srgbClr val="1B2230"/>
                 </a:solidFill>
                 <a:latin typeface="Arial"/>
               </a:rPr>
-              <a:t>Bước Trim gọi đích danh tên cột Store_Code, cột đó không còn tồn tại với tên mới</a:t>
+              <a:t>Combine lấy tên cột theo file mẫu: file mới thiếu cột Store_Code nên để trống, cột StoreCode bị bỏ</a:t>
             </a:r>
           </a:p>
         </p:txBody>
@@ -21275,7 +21533,7 @@
                           </a:solidFill>
                           <a:latin typeface="Arial"/>
                         </a:rPr>
-                        <a:t>Tên (đỏ)</a:t>
+                        <a:t>Tên</a:t>
                       </a:r>
                     </a:p>
                   </a:txBody>
